--- a/CSCI250-Fall2026/content/Week16_FineTuning-GenAIOps/slides.pptx
+++ b/CSCI250-Fall2026/content/Week16_FineTuning-GenAIOps/slides.pptx
@@ -20,6 +20,7 @@
     <p:sldId id="268" r:id="rId19"/>
     <p:sldId id="269" r:id="rId20"/>
     <p:sldId id="270" r:id="rId21"/>
+    <p:sldId id="271" r:id="rId22"/>
   </p:sldIdLst>
   <p:sldSz cx="12191695" cy="6858000" type="screen4x3"/>
   <p:notesSz cx="6858000" cy="9144000"/>
@@ -3238,6 +3239,328 @@
     <p:bg>
       <p:bgPr>
         <a:solidFill>
+          <a:srgbClr val="FFFFFF"/>
+        </a:solidFill>
+        <a:effectLst/>
+      </p:bgPr>
+    </p:bg>
+    <p:spTree>
+      <p:nvGrpSpPr>
+        <p:cNvPr id="1" name=""/>
+        <p:cNvGrpSpPr/>
+        <p:nvPr/>
+      </p:nvGrpSpPr>
+      <p:grpSpPr/>
+      <p:sp>
+        <p:nvSpPr>
+          <p:cNvPr id="2" name="Rectangle 1"/>
+          <p:cNvSpPr/>
+          <p:nvPr/>
+        </p:nvSpPr>
+        <p:spPr>
+          <a:xfrm>
+            <a:off x="0" y="0"/>
+            <a:ext cx="12191695" cy="1051560"/>
+          </a:xfrm>
+          <a:prstGeom prst="rect">
+            <a:avLst/>
+          </a:prstGeom>
+          <a:solidFill>
+            <a:srgbClr val="0B1F3A"/>
+          </a:solidFill>
+          <a:ln>
+            <a:noFill/>
+          </a:ln>
+          <a:effectLst/>
+        </p:spPr>
+        <p:style>
+          <a:lnRef idx="1">
+            <a:schemeClr val="accent1"/>
+          </a:lnRef>
+          <a:fillRef idx="3">
+            <a:schemeClr val="accent1"/>
+          </a:fillRef>
+          <a:effectRef idx="2">
+            <a:schemeClr val="accent1"/>
+          </a:effectRef>
+          <a:fontRef idx="minor">
+            <a:schemeClr val="lt1"/>
+          </a:fontRef>
+        </p:style>
+        <p:txBody>
+          <a:bodyPr rtlCol="0" anchor="ctr"/>
+          <a:lstStyle/>
+          <a:p>
+            <a:pPr algn="ctr"/>
+          </a:p>
+        </p:txBody>
+      </p:sp>
+      <p:sp>
+        <p:nvSpPr>
+          <p:cNvPr id="3" name="Rectangle 2"/>
+          <p:cNvSpPr/>
+          <p:nvPr/>
+        </p:nvSpPr>
+        <p:spPr>
+          <a:xfrm>
+            <a:off x="0" y="1051560"/>
+            <a:ext cx="12191695" cy="54864"/>
+          </a:xfrm>
+          <a:prstGeom prst="rect">
+            <a:avLst/>
+          </a:prstGeom>
+          <a:solidFill>
+            <a:srgbClr val="128C8C"/>
+          </a:solidFill>
+          <a:ln>
+            <a:noFill/>
+          </a:ln>
+          <a:effectLst/>
+        </p:spPr>
+        <p:style>
+          <a:lnRef idx="1">
+            <a:schemeClr val="accent1"/>
+          </a:lnRef>
+          <a:fillRef idx="3">
+            <a:schemeClr val="accent1"/>
+          </a:fillRef>
+          <a:effectRef idx="2">
+            <a:schemeClr val="accent1"/>
+          </a:effectRef>
+          <a:fontRef idx="minor">
+            <a:schemeClr val="lt1"/>
+          </a:fontRef>
+        </p:style>
+        <p:txBody>
+          <a:bodyPr rtlCol="0" anchor="ctr"/>
+          <a:lstStyle/>
+          <a:p>
+            <a:pPr algn="ctr"/>
+          </a:p>
+        </p:txBody>
+      </p:sp>
+      <p:sp>
+        <p:nvSpPr>
+          <p:cNvPr id="4" name="TextBox 3"/>
+          <p:cNvSpPr txBox="1"/>
+          <p:nvPr/>
+        </p:nvSpPr>
+        <p:spPr>
+          <a:xfrm>
+            <a:off x="548640" y="201168"/>
+            <a:ext cx="11064240" cy="731520"/>
+          </a:xfrm>
+          <a:prstGeom prst="rect">
+            <a:avLst/>
+          </a:prstGeom>
+          <a:noFill/>
+        </p:spPr>
+        <p:txBody>
+          <a:bodyPr wrap="square" anchor="ctr">
+            <a:spAutoFit/>
+          </a:bodyPr>
+          <a:lstStyle/>
+          <a:p>
+            <a:pPr algn="l"/>
+            <a:r>
+              <a:rPr sz="2800" b="1">
+                <a:solidFill>
+                  <a:srgbClr val="FFFFFF"/>
+                </a:solidFill>
+                <a:latin typeface="Calibri"/>
+              </a:rPr>
+              <a:t>The Post-Training Ladder (vocabulary)</a:t>
+            </a:r>
+          </a:p>
+        </p:txBody>
+      </p:sp>
+      <p:sp>
+        <p:nvSpPr>
+          <p:cNvPr id="5" name="TextBox 4"/>
+          <p:cNvSpPr txBox="1"/>
+          <p:nvPr/>
+        </p:nvSpPr>
+        <p:spPr>
+          <a:xfrm>
+            <a:off x="731520" y="1371600"/>
+            <a:ext cx="10698480" cy="4754880"/>
+          </a:xfrm>
+          <a:prstGeom prst="rect">
+            <a:avLst/>
+          </a:prstGeom>
+          <a:noFill/>
+        </p:spPr>
+        <p:txBody>
+          <a:bodyPr wrap="square">
+            <a:spAutoFit/>
+          </a:bodyPr>
+          <a:lstStyle/>
+          <a:p>
+            <a:pPr>
+              <a:spcAft>
+                <a:spcPts val="800"/>
+              </a:spcAft>
+            </a:pPr>
+            <a:r>
+              <a:rPr sz="2000">
+                <a:solidFill>
+                  <a:srgbClr val="1A1A1A"/>
+                </a:solidFill>
+                <a:latin typeface="Calibri"/>
+              </a:rPr>
+              <a:t>• Pretraining → SFT → preference optimization → RL</a:t>
+            </a:r>
+          </a:p>
+          <a:p>
+            <a:pPr>
+              <a:spcAft>
+                <a:spcPts val="800"/>
+              </a:spcAft>
+            </a:pPr>
+            <a:r>
+              <a:rPr sz="2000">
+                <a:solidFill>
+                  <a:srgbClr val="1A1A1A"/>
+                </a:solidFill>
+                <a:latin typeface="Calibri"/>
+              </a:rPr>
+              <a:t>• SFT: follow instructions on input→output pairs (the LoRA lab)</a:t>
+            </a:r>
+          </a:p>
+          <a:p>
+            <a:pPr>
+              <a:spcAft>
+                <a:spcPts val="800"/>
+              </a:spcAft>
+            </a:pPr>
+            <a:r>
+              <a:rPr sz="2000">
+                <a:solidFill>
+                  <a:srgbClr val="1A1A1A"/>
+                </a:solidFill>
+                <a:latin typeface="Calibri"/>
+              </a:rPr>
+              <a:t>• DPO: train on (chosen, rejected) pairs — the preference workhorse</a:t>
+            </a:r>
+          </a:p>
+          <a:p>
+            <a:pPr>
+              <a:spcAft>
+                <a:spcPts val="800"/>
+              </a:spcAft>
+            </a:pPr>
+            <a:r>
+              <a:rPr sz="2000">
+                <a:solidFill>
+                  <a:srgbClr val="1A1A1A"/>
+                </a:solidFill>
+                <a:latin typeface="Calibri"/>
+              </a:rPr>
+              <a:t>• RL: PPO (classic RLHF); GRPO + RLVR power reasoning models</a:t>
+            </a:r>
+          </a:p>
+          <a:p>
+            <a:pPr lvl="1">
+              <a:spcAft>
+                <a:spcPts val="800"/>
+              </a:spcAft>
+            </a:pPr>
+            <a:r>
+              <a:rPr sz="1800">
+                <a:solidFill>
+                  <a:srgbClr val="6B7280"/>
+                </a:solidFill>
+                <a:latin typeface="Calibri"/>
+              </a:rPr>
+              <a:t>– 'DPO-tuned' / 'GRPO for reasoning' — now you know where it sits</a:t>
+            </a:r>
+          </a:p>
+        </p:txBody>
+      </p:sp>
+      <p:sp>
+        <p:nvSpPr>
+          <p:cNvPr id="6" name="TextBox 5"/>
+          <p:cNvSpPr txBox="1"/>
+          <p:nvPr/>
+        </p:nvSpPr>
+        <p:spPr>
+          <a:xfrm>
+            <a:off x="365760" y="6446520"/>
+            <a:ext cx="8229600" cy="365760"/>
+          </a:xfrm>
+          <a:prstGeom prst="rect">
+            <a:avLst/>
+          </a:prstGeom>
+          <a:noFill/>
+        </p:spPr>
+        <p:txBody>
+          <a:bodyPr wrap="square">
+            <a:spAutoFit/>
+          </a:bodyPr>
+          <a:lstStyle/>
+          <a:p>
+            <a:pPr algn="l"/>
+            <a:r>
+              <a:rPr sz="1000" b="0">
+                <a:solidFill>
+                  <a:srgbClr val="6B7280"/>
+                </a:solidFill>
+                <a:latin typeface="Calibri"/>
+              </a:rPr>
+              <a:t>Palomar College · CSCI 250 · Fall 2026</a:t>
+            </a:r>
+          </a:p>
+        </p:txBody>
+      </p:sp>
+      <p:sp>
+        <p:nvSpPr>
+          <p:cNvPr id="7" name="TextBox 6"/>
+          <p:cNvSpPr txBox="1"/>
+          <p:nvPr/>
+        </p:nvSpPr>
+        <p:spPr>
+          <a:xfrm>
+            <a:off x="11155680" y="6446520"/>
+            <a:ext cx="822960" cy="365760"/>
+          </a:xfrm>
+          <a:prstGeom prst="rect">
+            <a:avLst/>
+          </a:prstGeom>
+          <a:noFill/>
+        </p:spPr>
+        <p:txBody>
+          <a:bodyPr wrap="square">
+            <a:spAutoFit/>
+          </a:bodyPr>
+          <a:lstStyle/>
+          <a:p>
+            <a:pPr algn="r"/>
+            <a:r>
+              <a:rPr sz="1000" b="0">
+                <a:solidFill>
+                  <a:srgbClr val="6B7280"/>
+                </a:solidFill>
+                <a:latin typeface="Calibri"/>
+              </a:rPr>
+              <a:t>10/16</a:t>
+            </a:r>
+          </a:p>
+        </p:txBody>
+      </p:sp>
+    </p:spTree>
+  </p:cSld>
+  <p:clrMapOvr>
+    <a:masterClrMapping/>
+  </p:clrMapOvr>
+</p:sld>
+</file>
+
+<file path=ppt/slides/slide11.xml><?xml version="1.0" encoding="utf-8"?>
+<p:sld xmlns:a="http://schemas.openxmlformats.org/drawingml/2006/main" xmlns:p="http://schemas.openxmlformats.org/presentationml/2006/main" xmlns:r="http://schemas.openxmlformats.org/officeDocument/2006/relationships">
+  <p:cSld>
+    <p:bg>
+      <p:bgPr>
+        <a:solidFill>
           <a:srgbClr val="128C8C"/>
         </a:solidFill>
         <a:effectLst/>
@@ -3293,7 +3616,7 @@
 </p:sld>
 </file>
 
-<file path=ppt/slides/slide11.xml><?xml version="1.0" encoding="utf-8"?>
+<file path=ppt/slides/slide12.xml><?xml version="1.0" encoding="utf-8"?>
 <p:sld xmlns:a="http://schemas.openxmlformats.org/drawingml/2006/main" xmlns:p="http://schemas.openxmlformats.org/presentationml/2006/main" xmlns:r="http://schemas.openxmlformats.org/officeDocument/2006/relationships">
   <p:cSld>
     <p:bg>
@@ -3602,7 +3925,7 @@
                 </a:solidFill>
                 <a:latin typeface="Calibri"/>
               </a:rPr>
-              <a:t>11/15</a:t>
+              <a:t>12/16</a:t>
             </a:r>
           </a:p>
         </p:txBody>
@@ -3615,7 +3938,7 @@
 </p:sld>
 </file>
 
-<file path=ppt/slides/slide12.xml><?xml version="1.0" encoding="utf-8"?>
+<file path=ppt/slides/slide13.xml><?xml version="1.0" encoding="utf-8"?>
 <p:sld xmlns:a="http://schemas.openxmlformats.org/drawingml/2006/main" xmlns:p="http://schemas.openxmlformats.org/presentationml/2006/main" xmlns:r="http://schemas.openxmlformats.org/officeDocument/2006/relationships">
   <p:cSld>
     <p:bg>
@@ -3664,434 +3987,6 @@
                 <a:latin typeface="Calibri"/>
               </a:rPr>
               <a:t>GenAI Ops &amp; Deployment</a:t>
-            </a:r>
-          </a:p>
-        </p:txBody>
-      </p:sp>
-    </p:spTree>
-  </p:cSld>
-  <p:clrMapOvr>
-    <a:masterClrMapping/>
-  </p:clrMapOvr>
-</p:sld>
-</file>
-
-<file path=ppt/slides/slide13.xml><?xml version="1.0" encoding="utf-8"?>
-<p:sld xmlns:a="http://schemas.openxmlformats.org/drawingml/2006/main" xmlns:p="http://schemas.openxmlformats.org/presentationml/2006/main" xmlns:r="http://schemas.openxmlformats.org/officeDocument/2006/relationships">
-  <p:cSld>
-    <p:bg>
-      <p:bgPr>
-        <a:solidFill>
-          <a:srgbClr val="FFFFFF"/>
-        </a:solidFill>
-        <a:effectLst/>
-      </p:bgPr>
-    </p:bg>
-    <p:spTree>
-      <p:nvGrpSpPr>
-        <p:cNvPr id="1" name=""/>
-        <p:cNvGrpSpPr/>
-        <p:nvPr/>
-      </p:nvGrpSpPr>
-      <p:grpSpPr/>
-      <p:sp>
-        <p:nvSpPr>
-          <p:cNvPr id="2" name="Rectangle 1"/>
-          <p:cNvSpPr/>
-          <p:nvPr/>
-        </p:nvSpPr>
-        <p:spPr>
-          <a:xfrm>
-            <a:off x="0" y="0"/>
-            <a:ext cx="12191695" cy="1051560"/>
-          </a:xfrm>
-          <a:prstGeom prst="rect">
-            <a:avLst/>
-          </a:prstGeom>
-          <a:solidFill>
-            <a:srgbClr val="0B1F3A"/>
-          </a:solidFill>
-          <a:ln>
-            <a:noFill/>
-          </a:ln>
-          <a:effectLst/>
-        </p:spPr>
-        <p:style>
-          <a:lnRef idx="1">
-            <a:schemeClr val="accent1"/>
-          </a:lnRef>
-          <a:fillRef idx="3">
-            <a:schemeClr val="accent1"/>
-          </a:fillRef>
-          <a:effectRef idx="2">
-            <a:schemeClr val="accent1"/>
-          </a:effectRef>
-          <a:fontRef idx="minor">
-            <a:schemeClr val="lt1"/>
-          </a:fontRef>
-        </p:style>
-        <p:txBody>
-          <a:bodyPr rtlCol="0" anchor="ctr"/>
-          <a:lstStyle/>
-          <a:p>
-            <a:pPr algn="ctr"/>
-          </a:p>
-        </p:txBody>
-      </p:sp>
-      <p:sp>
-        <p:nvSpPr>
-          <p:cNvPr id="3" name="Rectangle 2"/>
-          <p:cNvSpPr/>
-          <p:nvPr/>
-        </p:nvSpPr>
-        <p:spPr>
-          <a:xfrm>
-            <a:off x="0" y="1051560"/>
-            <a:ext cx="12191695" cy="54864"/>
-          </a:xfrm>
-          <a:prstGeom prst="rect">
-            <a:avLst/>
-          </a:prstGeom>
-          <a:solidFill>
-            <a:srgbClr val="128C8C"/>
-          </a:solidFill>
-          <a:ln>
-            <a:noFill/>
-          </a:ln>
-          <a:effectLst/>
-        </p:spPr>
-        <p:style>
-          <a:lnRef idx="1">
-            <a:schemeClr val="accent1"/>
-          </a:lnRef>
-          <a:fillRef idx="3">
-            <a:schemeClr val="accent1"/>
-          </a:fillRef>
-          <a:effectRef idx="2">
-            <a:schemeClr val="accent1"/>
-          </a:effectRef>
-          <a:fontRef idx="minor">
-            <a:schemeClr val="lt1"/>
-          </a:fontRef>
-        </p:style>
-        <p:txBody>
-          <a:bodyPr rtlCol="0" anchor="ctr"/>
-          <a:lstStyle/>
-          <a:p>
-            <a:pPr algn="ctr"/>
-          </a:p>
-        </p:txBody>
-      </p:sp>
-      <p:sp>
-        <p:nvSpPr>
-          <p:cNvPr id="4" name="TextBox 3"/>
-          <p:cNvSpPr txBox="1"/>
-          <p:nvPr/>
-        </p:nvSpPr>
-        <p:spPr>
-          <a:xfrm>
-            <a:off x="548640" y="201168"/>
-            <a:ext cx="11064240" cy="731520"/>
-          </a:xfrm>
-          <a:prstGeom prst="rect">
-            <a:avLst/>
-          </a:prstGeom>
-          <a:noFill/>
-        </p:spPr>
-        <p:txBody>
-          <a:bodyPr wrap="square" anchor="ctr">
-            <a:spAutoFit/>
-          </a:bodyPr>
-          <a:lstStyle/>
-          <a:p>
-            <a:pPr algn="l"/>
-            <a:r>
-              <a:rPr sz="2800" b="1">
-                <a:solidFill>
-                  <a:srgbClr val="FFFFFF"/>
-                </a:solidFill>
-                <a:latin typeface="Calibri"/>
-              </a:rPr>
-              <a:t>Serve a Pipeline as an API</a:t>
-            </a:r>
-          </a:p>
-        </p:txBody>
-      </p:sp>
-      <p:sp>
-        <p:nvSpPr>
-          <p:cNvPr id="5" name="Rectangle 4"/>
-          <p:cNvSpPr/>
-          <p:nvPr/>
-        </p:nvSpPr>
-        <p:spPr>
-          <a:xfrm>
-            <a:off x="548640" y="1325880"/>
-            <a:ext cx="11064240" cy="4480560"/>
-          </a:xfrm>
-          <a:prstGeom prst="rect">
-            <a:avLst/>
-          </a:prstGeom>
-          <a:solidFill>
-            <a:srgbClr val="1E1E1E"/>
-          </a:solidFill>
-          <a:ln>
-            <a:noFill/>
-          </a:ln>
-          <a:effectLst/>
-        </p:spPr>
-        <p:style>
-          <a:lnRef idx="1">
-            <a:schemeClr val="accent1"/>
-          </a:lnRef>
-          <a:fillRef idx="3">
-            <a:schemeClr val="accent1"/>
-          </a:fillRef>
-          <a:effectRef idx="2">
-            <a:schemeClr val="accent1"/>
-          </a:effectRef>
-          <a:fontRef idx="minor">
-            <a:schemeClr val="lt1"/>
-          </a:fontRef>
-        </p:style>
-        <p:txBody>
-          <a:bodyPr rtlCol="0" anchor="ctr" wrap="square" lIns="182880" tIns="137160"/>
-          <a:lstStyle/>
-          <a:p>
-            <a:pPr algn="ctr"/>
-            <a:r>
-              <a:rPr sz="1300">
-                <a:solidFill>
-                  <a:srgbClr val="E6E6E6"/>
-                </a:solidFill>
-                <a:latin typeface="Consolas"/>
-              </a:rPr>
-              <a:t>from flask import Flask, request, jsonify</a:t>
-            </a:r>
-          </a:p>
-          <a:p>
-            <a:r>
-              <a:rPr sz="1300">
-                <a:solidFill>
-                  <a:srgbClr val="E6E6E6"/>
-                </a:solidFill>
-                <a:latin typeface="Consolas"/>
-              </a:rPr>
-              <a:t>import anthropic</a:t>
-            </a:r>
-          </a:p>
-          <a:p>
-            <a:r>
-              <a:rPr sz="1300">
-                <a:solidFill>
-                  <a:srgbClr val="E6E6E6"/>
-                </a:solidFill>
-                <a:latin typeface="Consolas"/>
-              </a:rPr>
-              <a:t>app = Flask(__name__)</a:t>
-            </a:r>
-          </a:p>
-          <a:p>
-            <a:r>
-              <a:rPr sz="1300">
-                <a:solidFill>
-                  <a:srgbClr val="E6E6E6"/>
-                </a:solidFill>
-                <a:latin typeface="Consolas"/>
-              </a:rPr>
-              <a:t>client = anthropic.Anthropic()  # ANTHROPIC_API_KEY from env</a:t>
-            </a:r>
-          </a:p>
-          <a:p>
-            <a:r>
-              <a:rPr sz="1300">
-                <a:solidFill>
-                  <a:srgbClr val="E6E6E6"/>
-                </a:solidFill>
-                <a:latin typeface="Consolas"/>
-              </a:rPr>
-              <a:t> </a:t>
-            </a:r>
-          </a:p>
-          <a:p>
-            <a:r>
-              <a:rPr sz="1300">
-                <a:solidFill>
-                  <a:srgbClr val="E6E6E6"/>
-                </a:solidFill>
-                <a:latin typeface="Consolas"/>
-              </a:rPr>
-              <a:t>@app.post("/chat")</a:t>
-            </a:r>
-          </a:p>
-          <a:p>
-            <a:r>
-              <a:rPr sz="1300">
-                <a:solidFill>
-                  <a:srgbClr val="E6E6E6"/>
-                </a:solidFill>
-                <a:latin typeface="Consolas"/>
-              </a:rPr>
-              <a:t>def chat():</a:t>
-            </a:r>
-          </a:p>
-          <a:p>
-            <a:r>
-              <a:rPr sz="1300">
-                <a:solidFill>
-                  <a:srgbClr val="E6E6E6"/>
-                </a:solidFill>
-                <a:latin typeface="Consolas"/>
-              </a:rPr>
-              <a:t>    m = client.messages.create(</a:t>
-            </a:r>
-          </a:p>
-          <a:p>
-            <a:r>
-              <a:rPr sz="1300">
-                <a:solidFill>
-                  <a:srgbClr val="E6E6E6"/>
-                </a:solidFill>
-                <a:latin typeface="Consolas"/>
-              </a:rPr>
-              <a:t>        model="claude-haiku-4-5-20251001", max_tokens=300,</a:t>
-            </a:r>
-          </a:p>
-          <a:p>
-            <a:r>
-              <a:rPr sz="1300">
-                <a:solidFill>
-                  <a:srgbClr val="E6E6E6"/>
-                </a:solidFill>
-                <a:latin typeface="Consolas"/>
-              </a:rPr>
-              <a:t>        messages=[{"role": "user",</a:t>
-            </a:r>
-          </a:p>
-          <a:p>
-            <a:r>
-              <a:rPr sz="1300">
-                <a:solidFill>
-                  <a:srgbClr val="E6E6E6"/>
-                </a:solidFill>
-                <a:latin typeface="Consolas"/>
-              </a:rPr>
-              <a:t>                   "content": request.json["message"]}])</a:t>
-            </a:r>
-          </a:p>
-          <a:p>
-            <a:r>
-              <a:rPr sz="1300">
-                <a:solidFill>
-                  <a:srgbClr val="E6E6E6"/>
-                </a:solidFill>
-                <a:latin typeface="Consolas"/>
-              </a:rPr>
-              <a:t>    return jsonify({"reply": m.content[0].text})</a:t>
-            </a:r>
-          </a:p>
-        </p:txBody>
-      </p:sp>
-      <p:sp>
-        <p:nvSpPr>
-          <p:cNvPr id="6" name="TextBox 5"/>
-          <p:cNvSpPr txBox="1"/>
-          <p:nvPr/>
-        </p:nvSpPr>
-        <p:spPr>
-          <a:xfrm>
-            <a:off x="548640" y="5897880"/>
-            <a:ext cx="10515600" cy="457200"/>
-          </a:xfrm>
-          <a:prstGeom prst="rect">
-            <a:avLst/>
-          </a:prstGeom>
-          <a:noFill/>
-        </p:spPr>
-        <p:txBody>
-          <a:bodyPr wrap="square">
-            <a:spAutoFit/>
-          </a:bodyPr>
-          <a:lstStyle/>
-          <a:p>
-            <a:pPr algn="l"/>
-            <a:r>
-              <a:rPr sz="1400" b="0">
-                <a:solidFill>
-                  <a:srgbClr val="6B7280"/>
-                </a:solidFill>
-                <a:latin typeface="Calibri"/>
-              </a:rPr>
-              <a:t>Hosted API = no GPU to run; self-hosted = privacy + per-token control</a:t>
-            </a:r>
-          </a:p>
-        </p:txBody>
-      </p:sp>
-      <p:sp>
-        <p:nvSpPr>
-          <p:cNvPr id="7" name="TextBox 6"/>
-          <p:cNvSpPr txBox="1"/>
-          <p:nvPr/>
-        </p:nvSpPr>
-        <p:spPr>
-          <a:xfrm>
-            <a:off x="365760" y="6446520"/>
-            <a:ext cx="8229600" cy="365760"/>
-          </a:xfrm>
-          <a:prstGeom prst="rect">
-            <a:avLst/>
-          </a:prstGeom>
-          <a:noFill/>
-        </p:spPr>
-        <p:txBody>
-          <a:bodyPr wrap="square">
-            <a:spAutoFit/>
-          </a:bodyPr>
-          <a:lstStyle/>
-          <a:p>
-            <a:pPr algn="l"/>
-            <a:r>
-              <a:rPr sz="1000" b="0">
-                <a:solidFill>
-                  <a:srgbClr val="6B7280"/>
-                </a:solidFill>
-                <a:latin typeface="Calibri"/>
-              </a:rPr>
-              <a:t>Palomar College · CSCI 250 · Fall 2026</a:t>
-            </a:r>
-          </a:p>
-        </p:txBody>
-      </p:sp>
-      <p:sp>
-        <p:nvSpPr>
-          <p:cNvPr id="8" name="TextBox 7"/>
-          <p:cNvSpPr txBox="1"/>
-          <p:nvPr/>
-        </p:nvSpPr>
-        <p:spPr>
-          <a:xfrm>
-            <a:off x="11155680" y="6446520"/>
-            <a:ext cx="822960" cy="365760"/>
-          </a:xfrm>
-          <a:prstGeom prst="rect">
-            <a:avLst/>
-          </a:prstGeom>
-          <a:noFill/>
-        </p:spPr>
-        <p:txBody>
-          <a:bodyPr wrap="square">
-            <a:spAutoFit/>
-          </a:bodyPr>
-          <a:lstStyle/>
-          <a:p>
-            <a:pPr algn="r"/>
-            <a:r>
-              <a:rPr sz="1000" b="0">
-                <a:solidFill>
-                  <a:srgbClr val="6B7280"/>
-                </a:solidFill>
-                <a:latin typeface="Calibri"/>
-              </a:rPr>
-              <a:t>13/15</a:t>
             </a:r>
           </a:p>
         </p:txBody>
@@ -4240,21 +4135,195 @@
                 </a:solidFill>
                 <a:latin typeface="Calibri"/>
               </a:rPr>
-              <a:t>Monitor &amp; Control Cost / Latency</a:t>
-            </a:r>
-          </a:p>
-        </p:txBody>
-      </p:sp>
-      <p:sp>
-        <p:nvSpPr>
-          <p:cNvPr id="5" name="TextBox 4"/>
+              <a:t>Serve a Pipeline as an API</a:t>
+            </a:r>
+          </a:p>
+        </p:txBody>
+      </p:sp>
+      <p:sp>
+        <p:nvSpPr>
+          <p:cNvPr id="5" name="Rectangle 4"/>
+          <p:cNvSpPr/>
+          <p:nvPr/>
+        </p:nvSpPr>
+        <p:spPr>
+          <a:xfrm>
+            <a:off x="548640" y="1325880"/>
+            <a:ext cx="11064240" cy="4480560"/>
+          </a:xfrm>
+          <a:prstGeom prst="rect">
+            <a:avLst/>
+          </a:prstGeom>
+          <a:solidFill>
+            <a:srgbClr val="1E1E1E"/>
+          </a:solidFill>
+          <a:ln>
+            <a:noFill/>
+          </a:ln>
+          <a:effectLst/>
+        </p:spPr>
+        <p:style>
+          <a:lnRef idx="1">
+            <a:schemeClr val="accent1"/>
+          </a:lnRef>
+          <a:fillRef idx="3">
+            <a:schemeClr val="accent1"/>
+          </a:fillRef>
+          <a:effectRef idx="2">
+            <a:schemeClr val="accent1"/>
+          </a:effectRef>
+          <a:fontRef idx="minor">
+            <a:schemeClr val="lt1"/>
+          </a:fontRef>
+        </p:style>
+        <p:txBody>
+          <a:bodyPr rtlCol="0" anchor="ctr" wrap="square" lIns="182880" tIns="137160"/>
+          <a:lstStyle/>
+          <a:p>
+            <a:pPr algn="ctr"/>
+            <a:r>
+              <a:rPr sz="1300">
+                <a:solidFill>
+                  <a:srgbClr val="E6E6E6"/>
+                </a:solidFill>
+                <a:latin typeface="Consolas"/>
+              </a:rPr>
+              <a:t>from flask import Flask, request, jsonify</a:t>
+            </a:r>
+          </a:p>
+          <a:p>
+            <a:r>
+              <a:rPr sz="1300">
+                <a:solidFill>
+                  <a:srgbClr val="E6E6E6"/>
+                </a:solidFill>
+                <a:latin typeface="Consolas"/>
+              </a:rPr>
+              <a:t>import anthropic</a:t>
+            </a:r>
+          </a:p>
+          <a:p>
+            <a:r>
+              <a:rPr sz="1300">
+                <a:solidFill>
+                  <a:srgbClr val="E6E6E6"/>
+                </a:solidFill>
+                <a:latin typeface="Consolas"/>
+              </a:rPr>
+              <a:t>app = Flask(__name__)</a:t>
+            </a:r>
+          </a:p>
+          <a:p>
+            <a:r>
+              <a:rPr sz="1300">
+                <a:solidFill>
+                  <a:srgbClr val="E6E6E6"/>
+                </a:solidFill>
+                <a:latin typeface="Consolas"/>
+              </a:rPr>
+              <a:t>client = anthropic.Anthropic()  # ANTHROPIC_API_KEY from env</a:t>
+            </a:r>
+          </a:p>
+          <a:p>
+            <a:r>
+              <a:rPr sz="1300">
+                <a:solidFill>
+                  <a:srgbClr val="E6E6E6"/>
+                </a:solidFill>
+                <a:latin typeface="Consolas"/>
+              </a:rPr>
+              <a:t> </a:t>
+            </a:r>
+          </a:p>
+          <a:p>
+            <a:r>
+              <a:rPr sz="1300">
+                <a:solidFill>
+                  <a:srgbClr val="E6E6E6"/>
+                </a:solidFill>
+                <a:latin typeface="Consolas"/>
+              </a:rPr>
+              <a:t>@app.post("/chat")</a:t>
+            </a:r>
+          </a:p>
+          <a:p>
+            <a:r>
+              <a:rPr sz="1300">
+                <a:solidFill>
+                  <a:srgbClr val="E6E6E6"/>
+                </a:solidFill>
+                <a:latin typeface="Consolas"/>
+              </a:rPr>
+              <a:t>def chat():</a:t>
+            </a:r>
+          </a:p>
+          <a:p>
+            <a:r>
+              <a:rPr sz="1300">
+                <a:solidFill>
+                  <a:srgbClr val="E6E6E6"/>
+                </a:solidFill>
+                <a:latin typeface="Consolas"/>
+              </a:rPr>
+              <a:t>    m = client.messages.create(</a:t>
+            </a:r>
+          </a:p>
+          <a:p>
+            <a:r>
+              <a:rPr sz="1300">
+                <a:solidFill>
+                  <a:srgbClr val="E6E6E6"/>
+                </a:solidFill>
+                <a:latin typeface="Consolas"/>
+              </a:rPr>
+              <a:t>        model="claude-haiku-4-5-20251001", max_tokens=300,</a:t>
+            </a:r>
+          </a:p>
+          <a:p>
+            <a:r>
+              <a:rPr sz="1300">
+                <a:solidFill>
+                  <a:srgbClr val="E6E6E6"/>
+                </a:solidFill>
+                <a:latin typeface="Consolas"/>
+              </a:rPr>
+              <a:t>        messages=[{"role": "user",</a:t>
+            </a:r>
+          </a:p>
+          <a:p>
+            <a:r>
+              <a:rPr sz="1300">
+                <a:solidFill>
+                  <a:srgbClr val="E6E6E6"/>
+                </a:solidFill>
+                <a:latin typeface="Consolas"/>
+              </a:rPr>
+              <a:t>                   "content": request.json["message"]}])</a:t>
+            </a:r>
+          </a:p>
+          <a:p>
+            <a:r>
+              <a:rPr sz="1300">
+                <a:solidFill>
+                  <a:srgbClr val="E6E6E6"/>
+                </a:solidFill>
+                <a:latin typeface="Consolas"/>
+              </a:rPr>
+              <a:t>    return jsonify({"reply": m.content[0].text})</a:t>
+            </a:r>
+          </a:p>
+        </p:txBody>
+      </p:sp>
+      <p:sp>
+        <p:nvSpPr>
+          <p:cNvPr id="6" name="TextBox 5"/>
           <p:cNvSpPr txBox="1"/>
           <p:nvPr/>
         </p:nvSpPr>
         <p:spPr>
           <a:xfrm>
-            <a:off x="731520" y="1371600"/>
-            <a:ext cx="10698480" cy="4754880"/>
+            <a:off x="548640" y="5897880"/>
+            <a:ext cx="10515600" cy="457200"/>
           </a:xfrm>
           <a:prstGeom prst="rect">
             <a:avLst/>
@@ -4267,90 +4336,22 @@
           </a:bodyPr>
           <a:lstStyle/>
           <a:p>
-            <a:pPr>
-              <a:spcAft>
-                <a:spcPts val="800"/>
-              </a:spcAft>
-            </a:pPr>
-            <a:r>
-              <a:rPr sz="2000">
-                <a:solidFill>
-                  <a:srgbClr val="1A1A1A"/>
-                </a:solidFill>
-                <a:latin typeface="Calibri"/>
-              </a:rPr>
-              <a:t>• Latency: time-to-first-token + total time</a:t>
-            </a:r>
-          </a:p>
-          <a:p>
-            <a:pPr>
-              <a:spcAft>
-                <a:spcPts val="800"/>
-              </a:spcAft>
-            </a:pPr>
-            <a:r>
-              <a:rPr sz="2000">
-                <a:solidFill>
-                  <a:srgbClr val="1A1A1A"/>
-                </a:solidFill>
-                <a:latin typeface="Calibri"/>
-              </a:rPr>
-              <a:t>• Cost: priced per token — cap max_tokens, track usage</a:t>
-            </a:r>
-          </a:p>
-          <a:p>
-            <a:pPr>
-              <a:spcAft>
-                <a:spcPts val="800"/>
-              </a:spcAft>
-            </a:pPr>
-            <a:r>
-              <a:rPr sz="2000">
-                <a:solidFill>
-                  <a:srgbClr val="1A1A1A"/>
-                </a:solidFill>
-                <a:latin typeface="Calibri"/>
-              </a:rPr>
-              <a:t>• Pick the smallest model that passes eval; route easy → cheap</a:t>
-            </a:r>
-          </a:p>
-          <a:p>
-            <a:pPr>
-              <a:spcAft>
-                <a:spcPts val="800"/>
-              </a:spcAft>
-            </a:pPr>
-            <a:r>
-              <a:rPr sz="2000">
-                <a:solidFill>
-                  <a:srgbClr val="1A1A1A"/>
-                </a:solidFill>
-                <a:latin typeface="Calibri"/>
-              </a:rPr>
-              <a:t>• Cache repeats; shorten context (RAG); quantize self-hosted</a:t>
-            </a:r>
-          </a:p>
-          <a:p>
-            <a:pPr lvl="1">
-              <a:spcAft>
-                <a:spcPts val="800"/>
-              </a:spcAft>
-            </a:pPr>
-            <a:r>
-              <a:rPr sz="1800">
+            <a:pPr algn="l"/>
+            <a:r>
+              <a:rPr sz="1400" b="0">
                 <a:solidFill>
                   <a:srgbClr val="6B7280"/>
                 </a:solidFill>
                 <a:latin typeface="Calibri"/>
               </a:rPr>
-              <a:t>– Log prompts/responses → re-score (Week 17 eval harness)</a:t>
-            </a:r>
-          </a:p>
-        </p:txBody>
-      </p:sp>
-      <p:sp>
-        <p:nvSpPr>
-          <p:cNvPr id="6" name="TextBox 5"/>
+              <a:t>Hosted API = no GPU to run; self-hosted = privacy + per-token control</a:t>
+            </a:r>
+          </a:p>
+        </p:txBody>
+      </p:sp>
+      <p:sp>
+        <p:nvSpPr>
+          <p:cNvPr id="7" name="TextBox 6"/>
           <p:cNvSpPr txBox="1"/>
           <p:nvPr/>
         </p:nvSpPr>
@@ -4385,7 +4386,7 @@
       </p:sp>
       <p:sp>
         <p:nvSpPr>
-          <p:cNvPr id="7" name="TextBox 6"/>
+          <p:cNvPr id="8" name="TextBox 7"/>
           <p:cNvSpPr txBox="1"/>
           <p:nvPr/>
         </p:nvSpPr>
@@ -4413,7 +4414,7 @@
                 </a:solidFill>
                 <a:latin typeface="Calibri"/>
               </a:rPr>
-              <a:t>14/15</a:t>
+              <a:t>14/16</a:t>
             </a:r>
           </a:p>
         </p:txBody>
@@ -4427,6 +4428,328 @@
 </file>
 
 <file path=ppt/slides/slide15.xml><?xml version="1.0" encoding="utf-8"?>
+<p:sld xmlns:a="http://schemas.openxmlformats.org/drawingml/2006/main" xmlns:p="http://schemas.openxmlformats.org/presentationml/2006/main" xmlns:r="http://schemas.openxmlformats.org/officeDocument/2006/relationships">
+  <p:cSld>
+    <p:bg>
+      <p:bgPr>
+        <a:solidFill>
+          <a:srgbClr val="FFFFFF"/>
+        </a:solidFill>
+        <a:effectLst/>
+      </p:bgPr>
+    </p:bg>
+    <p:spTree>
+      <p:nvGrpSpPr>
+        <p:cNvPr id="1" name=""/>
+        <p:cNvGrpSpPr/>
+        <p:nvPr/>
+      </p:nvGrpSpPr>
+      <p:grpSpPr/>
+      <p:sp>
+        <p:nvSpPr>
+          <p:cNvPr id="2" name="Rectangle 1"/>
+          <p:cNvSpPr/>
+          <p:nvPr/>
+        </p:nvSpPr>
+        <p:spPr>
+          <a:xfrm>
+            <a:off x="0" y="0"/>
+            <a:ext cx="12191695" cy="1051560"/>
+          </a:xfrm>
+          <a:prstGeom prst="rect">
+            <a:avLst/>
+          </a:prstGeom>
+          <a:solidFill>
+            <a:srgbClr val="0B1F3A"/>
+          </a:solidFill>
+          <a:ln>
+            <a:noFill/>
+          </a:ln>
+          <a:effectLst/>
+        </p:spPr>
+        <p:style>
+          <a:lnRef idx="1">
+            <a:schemeClr val="accent1"/>
+          </a:lnRef>
+          <a:fillRef idx="3">
+            <a:schemeClr val="accent1"/>
+          </a:fillRef>
+          <a:effectRef idx="2">
+            <a:schemeClr val="accent1"/>
+          </a:effectRef>
+          <a:fontRef idx="minor">
+            <a:schemeClr val="lt1"/>
+          </a:fontRef>
+        </p:style>
+        <p:txBody>
+          <a:bodyPr rtlCol="0" anchor="ctr"/>
+          <a:lstStyle/>
+          <a:p>
+            <a:pPr algn="ctr"/>
+          </a:p>
+        </p:txBody>
+      </p:sp>
+      <p:sp>
+        <p:nvSpPr>
+          <p:cNvPr id="3" name="Rectangle 2"/>
+          <p:cNvSpPr/>
+          <p:nvPr/>
+        </p:nvSpPr>
+        <p:spPr>
+          <a:xfrm>
+            <a:off x="0" y="1051560"/>
+            <a:ext cx="12191695" cy="54864"/>
+          </a:xfrm>
+          <a:prstGeom prst="rect">
+            <a:avLst/>
+          </a:prstGeom>
+          <a:solidFill>
+            <a:srgbClr val="128C8C"/>
+          </a:solidFill>
+          <a:ln>
+            <a:noFill/>
+          </a:ln>
+          <a:effectLst/>
+        </p:spPr>
+        <p:style>
+          <a:lnRef idx="1">
+            <a:schemeClr val="accent1"/>
+          </a:lnRef>
+          <a:fillRef idx="3">
+            <a:schemeClr val="accent1"/>
+          </a:fillRef>
+          <a:effectRef idx="2">
+            <a:schemeClr val="accent1"/>
+          </a:effectRef>
+          <a:fontRef idx="minor">
+            <a:schemeClr val="lt1"/>
+          </a:fontRef>
+        </p:style>
+        <p:txBody>
+          <a:bodyPr rtlCol="0" anchor="ctr"/>
+          <a:lstStyle/>
+          <a:p>
+            <a:pPr algn="ctr"/>
+          </a:p>
+        </p:txBody>
+      </p:sp>
+      <p:sp>
+        <p:nvSpPr>
+          <p:cNvPr id="4" name="TextBox 3"/>
+          <p:cNvSpPr txBox="1"/>
+          <p:nvPr/>
+        </p:nvSpPr>
+        <p:spPr>
+          <a:xfrm>
+            <a:off x="548640" y="201168"/>
+            <a:ext cx="11064240" cy="731520"/>
+          </a:xfrm>
+          <a:prstGeom prst="rect">
+            <a:avLst/>
+          </a:prstGeom>
+          <a:noFill/>
+        </p:spPr>
+        <p:txBody>
+          <a:bodyPr wrap="square" anchor="ctr">
+            <a:spAutoFit/>
+          </a:bodyPr>
+          <a:lstStyle/>
+          <a:p>
+            <a:pPr algn="l"/>
+            <a:r>
+              <a:rPr sz="2800" b="1">
+                <a:solidFill>
+                  <a:srgbClr val="FFFFFF"/>
+                </a:solidFill>
+                <a:latin typeface="Calibri"/>
+              </a:rPr>
+              <a:t>Monitor &amp; Control Cost / Latency</a:t>
+            </a:r>
+          </a:p>
+        </p:txBody>
+      </p:sp>
+      <p:sp>
+        <p:nvSpPr>
+          <p:cNvPr id="5" name="TextBox 4"/>
+          <p:cNvSpPr txBox="1"/>
+          <p:nvPr/>
+        </p:nvSpPr>
+        <p:spPr>
+          <a:xfrm>
+            <a:off x="731520" y="1371600"/>
+            <a:ext cx="10698480" cy="4754880"/>
+          </a:xfrm>
+          <a:prstGeom prst="rect">
+            <a:avLst/>
+          </a:prstGeom>
+          <a:noFill/>
+        </p:spPr>
+        <p:txBody>
+          <a:bodyPr wrap="square">
+            <a:spAutoFit/>
+          </a:bodyPr>
+          <a:lstStyle/>
+          <a:p>
+            <a:pPr>
+              <a:spcAft>
+                <a:spcPts val="800"/>
+              </a:spcAft>
+            </a:pPr>
+            <a:r>
+              <a:rPr sz="2000">
+                <a:solidFill>
+                  <a:srgbClr val="1A1A1A"/>
+                </a:solidFill>
+                <a:latin typeface="Calibri"/>
+              </a:rPr>
+              <a:t>• Latency: time-to-first-token + total time</a:t>
+            </a:r>
+          </a:p>
+          <a:p>
+            <a:pPr>
+              <a:spcAft>
+                <a:spcPts val="800"/>
+              </a:spcAft>
+            </a:pPr>
+            <a:r>
+              <a:rPr sz="2000">
+                <a:solidFill>
+                  <a:srgbClr val="1A1A1A"/>
+                </a:solidFill>
+                <a:latin typeface="Calibri"/>
+              </a:rPr>
+              <a:t>• Cost: priced per token — cap max_tokens, track usage</a:t>
+            </a:r>
+          </a:p>
+          <a:p>
+            <a:pPr>
+              <a:spcAft>
+                <a:spcPts val="800"/>
+              </a:spcAft>
+            </a:pPr>
+            <a:r>
+              <a:rPr sz="2000">
+                <a:solidFill>
+                  <a:srgbClr val="1A1A1A"/>
+                </a:solidFill>
+                <a:latin typeface="Calibri"/>
+              </a:rPr>
+              <a:t>• Pick the smallest model that passes eval; route easy → cheap</a:t>
+            </a:r>
+          </a:p>
+          <a:p>
+            <a:pPr>
+              <a:spcAft>
+                <a:spcPts val="800"/>
+              </a:spcAft>
+            </a:pPr>
+            <a:r>
+              <a:rPr sz="2000">
+                <a:solidFill>
+                  <a:srgbClr val="1A1A1A"/>
+                </a:solidFill>
+                <a:latin typeface="Calibri"/>
+              </a:rPr>
+              <a:t>• Cache repeats; shorten context (RAG); quantize self-hosted</a:t>
+            </a:r>
+          </a:p>
+          <a:p>
+            <a:pPr lvl="1">
+              <a:spcAft>
+                <a:spcPts val="800"/>
+              </a:spcAft>
+            </a:pPr>
+            <a:r>
+              <a:rPr sz="1800">
+                <a:solidFill>
+                  <a:srgbClr val="6B7280"/>
+                </a:solidFill>
+                <a:latin typeface="Calibri"/>
+              </a:rPr>
+              <a:t>– Log prompts/responses → re-score (Week 17 eval harness)</a:t>
+            </a:r>
+          </a:p>
+        </p:txBody>
+      </p:sp>
+      <p:sp>
+        <p:nvSpPr>
+          <p:cNvPr id="6" name="TextBox 5"/>
+          <p:cNvSpPr txBox="1"/>
+          <p:nvPr/>
+        </p:nvSpPr>
+        <p:spPr>
+          <a:xfrm>
+            <a:off x="365760" y="6446520"/>
+            <a:ext cx="8229600" cy="365760"/>
+          </a:xfrm>
+          <a:prstGeom prst="rect">
+            <a:avLst/>
+          </a:prstGeom>
+          <a:noFill/>
+        </p:spPr>
+        <p:txBody>
+          <a:bodyPr wrap="square">
+            <a:spAutoFit/>
+          </a:bodyPr>
+          <a:lstStyle/>
+          <a:p>
+            <a:pPr algn="l"/>
+            <a:r>
+              <a:rPr sz="1000" b="0">
+                <a:solidFill>
+                  <a:srgbClr val="6B7280"/>
+                </a:solidFill>
+                <a:latin typeface="Calibri"/>
+              </a:rPr>
+              <a:t>Palomar College · CSCI 250 · Fall 2026</a:t>
+            </a:r>
+          </a:p>
+        </p:txBody>
+      </p:sp>
+      <p:sp>
+        <p:nvSpPr>
+          <p:cNvPr id="7" name="TextBox 6"/>
+          <p:cNvSpPr txBox="1"/>
+          <p:nvPr/>
+        </p:nvSpPr>
+        <p:spPr>
+          <a:xfrm>
+            <a:off x="11155680" y="6446520"/>
+            <a:ext cx="822960" cy="365760"/>
+          </a:xfrm>
+          <a:prstGeom prst="rect">
+            <a:avLst/>
+          </a:prstGeom>
+          <a:noFill/>
+        </p:spPr>
+        <p:txBody>
+          <a:bodyPr wrap="square">
+            <a:spAutoFit/>
+          </a:bodyPr>
+          <a:lstStyle/>
+          <a:p>
+            <a:pPr algn="r"/>
+            <a:r>
+              <a:rPr sz="1000" b="0">
+                <a:solidFill>
+                  <a:srgbClr val="6B7280"/>
+                </a:solidFill>
+                <a:latin typeface="Calibri"/>
+              </a:rPr>
+              <a:t>15/16</a:t>
+            </a:r>
+          </a:p>
+        </p:txBody>
+      </p:sp>
+    </p:spTree>
+  </p:cSld>
+  <p:clrMapOvr>
+    <a:masterClrMapping/>
+  </p:clrMapOvr>
+</p:sld>
+</file>
+
+<file path=ppt/slides/slide16.xml><?xml version="1.0" encoding="utf-8"?>
 <p:sld xmlns:a="http://schemas.openxmlformats.org/drawingml/2006/main" xmlns:p="http://schemas.openxmlformats.org/presentationml/2006/main" xmlns:r="http://schemas.openxmlformats.org/officeDocument/2006/relationships">
   <p:cSld>
     <p:bg>
@@ -4691,7 +5014,7 @@
                 </a:solidFill>
                 <a:latin typeface="Calibri"/>
               </a:rPr>
-              <a:t>15/15</a:t>
+              <a:t>16/16</a:t>
             </a:r>
           </a:p>
         </p:txBody>
@@ -5029,7 +5352,7 @@
                 </a:solidFill>
                 <a:latin typeface="Calibri"/>
               </a:rPr>
-              <a:t>2/15</a:t>
+              <a:t>2/16</a:t>
             </a:r>
           </a:p>
         </p:txBody>
@@ -5412,7 +5735,7 @@
                 </a:solidFill>
                 <a:latin typeface="Calibri"/>
               </a:rPr>
-              <a:t>4/15</a:t>
+              <a:t>4/16</a:t>
             </a:r>
           </a:p>
         </p:txBody>
@@ -5904,7 +6227,7 @@
                 </a:solidFill>
                 <a:latin typeface="Calibri"/>
               </a:rPr>
-              <a:t>6/15</a:t>
+              <a:t>6/16</a:t>
             </a:r>
           </a:p>
         </p:txBody>
@@ -6287,7 +6610,7 @@
                 </a:solidFill>
                 <a:latin typeface="Calibri"/>
               </a:rPr>
-              <a:t>8/15</a:t>
+              <a:t>8/16</a:t>
             </a:r>
           </a:p>
         </p:txBody>
@@ -6649,7 +6972,7 @@
                 </a:solidFill>
                 <a:latin typeface="Calibri"/>
               </a:rPr>
-              <a:t>9/15</a:t>
+              <a:t>9/16</a:t>
             </a:r>
           </a:p>
         </p:txBody>
